--- a/doc/개발환경_설치매뉴얼(Nest.JS).pptx
+++ b/doc/개발환경_설치매뉴얼(Nest.JS).pptx
@@ -8,6 +8,9 @@
     <p:sldId id="256" r:id="rId2"/>
     <p:sldId id="277" r:id="rId3"/>
     <p:sldId id="278" r:id="rId4"/>
+    <p:sldId id="280" r:id="rId5"/>
+    <p:sldId id="281" r:id="rId6"/>
+    <p:sldId id="279" r:id="rId7"/>
   </p:sldIdLst>
   <p:sldSz cx="12192000" cy="6858000"/>
   <p:notesSz cx="6858000" cy="9144000"/>
@@ -118,6 +121,9 @@
         <p14:section name="제목 없는 구역" id="{53E5FD2C-994F-4CFF-8214-B8896DC0A73D}">
           <p14:sldIdLst>
             <p14:sldId id="278"/>
+            <p14:sldId id="280"/>
+            <p14:sldId id="281"/>
+            <p14:sldId id="279"/>
           </p14:sldIdLst>
         </p14:section>
       </p14:sectionLst>
@@ -3737,6 +3743,516 @@
     <p:extLst>
       <p:ext uri="{BB962C8B-B14F-4D97-AF65-F5344CB8AC3E}">
         <p14:creationId xmlns:p14="http://schemas.microsoft.com/office/powerpoint/2010/main" val="892059215"/>
+      </p:ext>
+    </p:extLst>
+  </p:cSld>
+  <p:clrMapOvr>
+    <a:masterClrMapping/>
+  </p:clrMapOvr>
+</p:sld>
+</file>
+
+<file path=ppt/slides/slide4.xml><?xml version="1.0" encoding="utf-8"?>
+<p:sld xmlns:a="http://schemas.openxmlformats.org/drawingml/2006/main" xmlns:r="http://schemas.openxmlformats.org/officeDocument/2006/relationships" xmlns:p="http://schemas.openxmlformats.org/presentationml/2006/main">
+  <p:cSld>
+    <p:spTree>
+      <p:nvGrpSpPr>
+        <p:cNvPr id="1" name=""/>
+        <p:cNvGrpSpPr/>
+        <p:nvPr/>
+      </p:nvGrpSpPr>
+      <p:grpSpPr>
+        <a:xfrm>
+          <a:off x="0" y="0"/>
+          <a:ext cx="0" cy="0"/>
+          <a:chOff x="0" y="0"/>
+          <a:chExt cx="0" cy="0"/>
+        </a:xfrm>
+      </p:grpSpPr>
+      <p:sp>
+        <p:nvSpPr>
+          <p:cNvPr id="2" name="제목 1">
+            <a:extLst>
+              <a:ext uri="{FF2B5EF4-FFF2-40B4-BE49-F238E27FC236}">
+                <a16:creationId xmlns:a16="http://schemas.microsoft.com/office/drawing/2014/main" id="{12C7B522-6772-82D1-965B-52D8C9C57A7A}"/>
+              </a:ext>
+            </a:extLst>
+          </p:cNvPr>
+          <p:cNvSpPr>
+            <a:spLocks noGrp="1"/>
+          </p:cNvSpPr>
+          <p:nvPr>
+            <p:ph type="title"/>
+          </p:nvPr>
+        </p:nvSpPr>
+        <p:spPr/>
+        <p:txBody>
+          <a:bodyPr/>
+          <a:lstStyle/>
+          <a:p>
+            <a:r>
+              <a:rPr lang="en-US" altLang="ko-KR" dirty="0"/>
+              <a:t>Configuration</a:t>
+            </a:r>
+            <a:endParaRPr lang="ko-KR" altLang="en-US" dirty="0"/>
+          </a:p>
+        </p:txBody>
+      </p:sp>
+      <p:sp>
+        <p:nvSpPr>
+          <p:cNvPr id="3" name="내용 개체 틀 2">
+            <a:extLst>
+              <a:ext uri="{FF2B5EF4-FFF2-40B4-BE49-F238E27FC236}">
+                <a16:creationId xmlns:a16="http://schemas.microsoft.com/office/drawing/2014/main" id="{4882C45D-ABB1-6EFC-EEA5-A11D0A2000EF}"/>
+              </a:ext>
+            </a:extLst>
+          </p:cNvPr>
+          <p:cNvSpPr>
+            <a:spLocks noGrp="1"/>
+          </p:cNvSpPr>
+          <p:nvPr>
+            <p:ph idx="1"/>
+          </p:nvPr>
+        </p:nvSpPr>
+        <p:spPr/>
+        <p:txBody>
+          <a:bodyPr/>
+          <a:lstStyle/>
+          <a:p>
+            <a:r>
+              <a:rPr lang="en-US" altLang="ko-KR" dirty="0"/>
+              <a:t>$</a:t>
+            </a:r>
+            <a:r>
+              <a:rPr lang="en-US" altLang="ko-KR" dirty="0" err="1"/>
+              <a:t>npm</a:t>
+            </a:r>
+            <a:r>
+              <a:rPr lang="en-US" altLang="ko-KR" dirty="0"/>
+              <a:t> install –save @nestjs/config</a:t>
+            </a:r>
+            <a:endParaRPr lang="ko-KR" altLang="en-US" dirty="0"/>
+          </a:p>
+        </p:txBody>
+      </p:sp>
+      <p:sp>
+        <p:nvSpPr>
+          <p:cNvPr id="4" name="직사각형 3">
+            <a:extLst>
+              <a:ext uri="{FF2B5EF4-FFF2-40B4-BE49-F238E27FC236}">
+                <a16:creationId xmlns:a16="http://schemas.microsoft.com/office/drawing/2014/main" id="{704D04A9-CFFE-37C2-EC08-EE097F2CB77D}"/>
+              </a:ext>
+            </a:extLst>
+          </p:cNvPr>
+          <p:cNvSpPr/>
+          <p:nvPr/>
+        </p:nvSpPr>
+        <p:spPr>
+          <a:xfrm>
+            <a:off x="838200" y="2622550"/>
+            <a:ext cx="6267450" cy="4064000"/>
+          </a:xfrm>
+          <a:prstGeom prst="rect">
+            <a:avLst/>
+          </a:prstGeom>
+        </p:spPr>
+        <p:style>
+          <a:lnRef idx="2">
+            <a:schemeClr val="dk1"/>
+          </a:lnRef>
+          <a:fillRef idx="1">
+            <a:schemeClr val="lt1"/>
+          </a:fillRef>
+          <a:effectRef idx="0">
+            <a:schemeClr val="dk1"/>
+          </a:effectRef>
+          <a:fontRef idx="minor">
+            <a:schemeClr val="dk1"/>
+          </a:fontRef>
+        </p:style>
+        <p:txBody>
+          <a:bodyPr rtlCol="0" anchor="ctr"/>
+          <a:lstStyle/>
+          <a:p>
+            <a:r>
+              <a:rPr lang="en-US" altLang="ko-KR" dirty="0"/>
+              <a:t>import { Module } from '@</a:t>
+            </a:r>
+            <a:r>
+              <a:rPr lang="en-US" altLang="ko-KR" dirty="0" err="1"/>
+              <a:t>nestjs</a:t>
+            </a:r>
+            <a:r>
+              <a:rPr lang="en-US" altLang="ko-KR" dirty="0"/>
+              <a:t>/common';</a:t>
+            </a:r>
+          </a:p>
+          <a:p>
+            <a:r>
+              <a:rPr lang="en-US" altLang="ko-KR" dirty="0"/>
+              <a:t>import { </a:t>
+            </a:r>
+            <a:r>
+              <a:rPr lang="en-US" altLang="ko-KR" dirty="0" err="1"/>
+              <a:t>ConfigModule</a:t>
+            </a:r>
+            <a:r>
+              <a:rPr lang="en-US" altLang="ko-KR" dirty="0"/>
+              <a:t> } from '@</a:t>
+            </a:r>
+            <a:r>
+              <a:rPr lang="en-US" altLang="ko-KR" dirty="0" err="1"/>
+              <a:t>nestjs</a:t>
+            </a:r>
+            <a:r>
+              <a:rPr lang="en-US" altLang="ko-KR" dirty="0"/>
+              <a:t>/config';</a:t>
+            </a:r>
+          </a:p>
+          <a:p>
+            <a:endParaRPr lang="en-US" altLang="ko-KR" dirty="0"/>
+          </a:p>
+          <a:p>
+            <a:r>
+              <a:rPr lang="en-US" altLang="ko-KR" dirty="0"/>
+              <a:t>@Module({</a:t>
+            </a:r>
+          </a:p>
+          <a:p>
+            <a:r>
+              <a:rPr lang="en-US" altLang="ko-KR" dirty="0"/>
+              <a:t>  imports: [</a:t>
+            </a:r>
+            <a:r>
+              <a:rPr lang="en-US" altLang="ko-KR" dirty="0" err="1"/>
+              <a:t>ConfigModule.forRoot</a:t>
+            </a:r>
+            <a:r>
+              <a:rPr lang="en-US" altLang="ko-KR" dirty="0"/>
+              <a:t>({</a:t>
+            </a:r>
+          </a:p>
+          <a:p>
+            <a:r>
+              <a:rPr lang="en-US" altLang="ko-KR" dirty="0"/>
+              <a:t>	     cache: true,</a:t>
+            </a:r>
+          </a:p>
+          <a:p>
+            <a:r>
+              <a:rPr lang="en-US" altLang="ko-KR" dirty="0"/>
+              <a:t>	     </a:t>
+            </a:r>
+            <a:r>
+              <a:rPr lang="en-US" altLang="ko-KR" dirty="0" err="1"/>
+              <a:t>isGlobal</a:t>
+            </a:r>
+            <a:r>
+              <a:rPr lang="en-US" altLang="ko-KR" dirty="0"/>
+              <a:t>: true,</a:t>
+            </a:r>
+          </a:p>
+          <a:p>
+            <a:r>
+              <a:rPr lang="en-US" altLang="ko-KR" dirty="0"/>
+              <a:t>	   })],</a:t>
+            </a:r>
+          </a:p>
+          <a:p>
+            <a:pPr fontAlgn="base" latinLnBrk="0"/>
+            <a:r>
+              <a:rPr lang="en-US" altLang="ko-KR" dirty="0"/>
+              <a:t>  controllers: [</a:t>
+            </a:r>
+            <a:r>
+              <a:rPr lang="en-US" altLang="ko-KR" dirty="0" err="1"/>
+              <a:t>AppController</a:t>
+            </a:r>
+            <a:r>
+              <a:rPr lang="en-US" altLang="ko-KR" dirty="0"/>
+              <a:t>],</a:t>
+            </a:r>
+          </a:p>
+          <a:p>
+            <a:pPr fontAlgn="base" latinLnBrk="0"/>
+            <a:r>
+              <a:rPr lang="en-US" altLang="ko-KR" dirty="0"/>
+              <a:t>  providers: [</a:t>
+            </a:r>
+            <a:r>
+              <a:rPr lang="en-US" altLang="ko-KR" dirty="0" err="1"/>
+              <a:t>AppService</a:t>
+            </a:r>
+            <a:r>
+              <a:rPr lang="en-US" altLang="ko-KR" dirty="0"/>
+              <a:t>],</a:t>
+            </a:r>
+          </a:p>
+          <a:p>
+            <a:r>
+              <a:rPr lang="en-US" altLang="ko-KR" dirty="0"/>
+              <a:t>})</a:t>
+            </a:r>
+          </a:p>
+          <a:p>
+            <a:endParaRPr lang="en-US" altLang="ko-KR" dirty="0"/>
+          </a:p>
+          <a:p>
+            <a:r>
+              <a:rPr lang="en-US" altLang="ko-KR" dirty="0"/>
+              <a:t>export class </a:t>
+            </a:r>
+            <a:r>
+              <a:rPr lang="en-US" altLang="ko-KR" dirty="0" err="1"/>
+              <a:t>AppModule</a:t>
+            </a:r>
+            <a:r>
+              <a:rPr lang="en-US" altLang="ko-KR" dirty="0"/>
+              <a:t> {}</a:t>
+            </a:r>
+            <a:endParaRPr lang="ko-KR" altLang="en-US" dirty="0"/>
+          </a:p>
+        </p:txBody>
+      </p:sp>
+    </p:spTree>
+    <p:extLst>
+      <p:ext uri="{BB962C8B-B14F-4D97-AF65-F5344CB8AC3E}">
+        <p14:creationId xmlns:p14="http://schemas.microsoft.com/office/powerpoint/2010/main" val="658138302"/>
+      </p:ext>
+    </p:extLst>
+  </p:cSld>
+  <p:clrMapOvr>
+    <a:masterClrMapping/>
+  </p:clrMapOvr>
+</p:sld>
+</file>
+
+<file path=ppt/slides/slide5.xml><?xml version="1.0" encoding="utf-8"?>
+<p:sld xmlns:a="http://schemas.openxmlformats.org/drawingml/2006/main" xmlns:r="http://schemas.openxmlformats.org/officeDocument/2006/relationships" xmlns:p="http://schemas.openxmlformats.org/presentationml/2006/main">
+  <p:cSld>
+    <p:spTree>
+      <p:nvGrpSpPr>
+        <p:cNvPr id="1" name=""/>
+        <p:cNvGrpSpPr/>
+        <p:nvPr/>
+      </p:nvGrpSpPr>
+      <p:grpSpPr>
+        <a:xfrm>
+          <a:off x="0" y="0"/>
+          <a:ext cx="0" cy="0"/>
+          <a:chOff x="0" y="0"/>
+          <a:chExt cx="0" cy="0"/>
+        </a:xfrm>
+      </p:grpSpPr>
+      <p:sp>
+        <p:nvSpPr>
+          <p:cNvPr id="2" name="제목 1">
+            <a:extLst>
+              <a:ext uri="{FF2B5EF4-FFF2-40B4-BE49-F238E27FC236}">
+                <a16:creationId xmlns:a16="http://schemas.microsoft.com/office/drawing/2014/main" id="{27986D15-41C7-1CCB-101C-6202C2C74E35}"/>
+              </a:ext>
+            </a:extLst>
+          </p:cNvPr>
+          <p:cNvSpPr>
+            <a:spLocks noGrp="1"/>
+          </p:cNvSpPr>
+          <p:nvPr>
+            <p:ph type="title"/>
+          </p:nvPr>
+        </p:nvSpPr>
+        <p:spPr/>
+        <p:txBody>
+          <a:bodyPr/>
+          <a:lstStyle/>
+          <a:p>
+            <a:endParaRPr lang="ko-KR" altLang="en-US"/>
+          </a:p>
+        </p:txBody>
+      </p:sp>
+      <p:sp>
+        <p:nvSpPr>
+          <p:cNvPr id="3" name="내용 개체 틀 2">
+            <a:extLst>
+              <a:ext uri="{FF2B5EF4-FFF2-40B4-BE49-F238E27FC236}">
+                <a16:creationId xmlns:a16="http://schemas.microsoft.com/office/drawing/2014/main" id="{E38F466D-228A-DAFC-C448-109AE451E400}"/>
+              </a:ext>
+            </a:extLst>
+          </p:cNvPr>
+          <p:cNvSpPr>
+            <a:spLocks noGrp="1"/>
+          </p:cNvSpPr>
+          <p:nvPr>
+            <p:ph idx="1"/>
+          </p:nvPr>
+        </p:nvSpPr>
+        <p:spPr/>
+        <p:txBody>
+          <a:bodyPr/>
+          <a:lstStyle/>
+          <a:p>
+            <a:r>
+              <a:rPr lang="en-US" altLang="ko-KR" dirty="0"/>
+              <a:t>.env</a:t>
+            </a:r>
+          </a:p>
+          <a:p>
+            <a:endParaRPr lang="en-US" altLang="ko-KR" dirty="0"/>
+          </a:p>
+          <a:p>
+            <a:r>
+              <a:rPr lang="en-US" altLang="ko-KR" dirty="0" err="1"/>
+              <a:t>ConfigService</a:t>
+            </a:r>
+            <a:r>
+              <a:rPr lang="en-US" altLang="ko-KR" dirty="0"/>
+              <a:t> </a:t>
+            </a:r>
+            <a:r>
+              <a:rPr lang="ko-KR" altLang="en-US" dirty="0"/>
+              <a:t>사용</a:t>
+            </a:r>
+            <a:endParaRPr lang="en-US" altLang="ko-KR" dirty="0"/>
+          </a:p>
+          <a:p>
+            <a:pPr lvl="1"/>
+            <a:endParaRPr lang="en-US" altLang="ko-KR" dirty="0"/>
+          </a:p>
+          <a:p>
+            <a:r>
+              <a:rPr lang="en-US" altLang="ko-KR" dirty="0" err="1"/>
+              <a:t>ConfigType</a:t>
+            </a:r>
+            <a:r>
+              <a:rPr lang="en-US" altLang="ko-KR" dirty="0"/>
+              <a:t> </a:t>
+            </a:r>
+            <a:r>
+              <a:rPr lang="ko-KR" altLang="en-US" dirty="0"/>
+              <a:t>사용</a:t>
+            </a:r>
+            <a:endParaRPr lang="en-US" altLang="ko-KR" dirty="0"/>
+          </a:p>
+          <a:p>
+            <a:pPr lvl="1"/>
+            <a:endParaRPr lang="en-US" altLang="ko-KR" dirty="0"/>
+          </a:p>
+          <a:p>
+            <a:endParaRPr lang="en-US" altLang="ko-KR" dirty="0"/>
+          </a:p>
+          <a:p>
+            <a:endParaRPr lang="ko-KR" altLang="en-US" dirty="0"/>
+          </a:p>
+        </p:txBody>
+      </p:sp>
+    </p:spTree>
+    <p:extLst>
+      <p:ext uri="{BB962C8B-B14F-4D97-AF65-F5344CB8AC3E}">
+        <p14:creationId xmlns:p14="http://schemas.microsoft.com/office/powerpoint/2010/main" val="99820330"/>
+      </p:ext>
+    </p:extLst>
+  </p:cSld>
+  <p:clrMapOvr>
+    <a:masterClrMapping/>
+  </p:clrMapOvr>
+</p:sld>
+</file>
+
+<file path=ppt/slides/slide6.xml><?xml version="1.0" encoding="utf-8"?>
+<p:sld xmlns:a="http://schemas.openxmlformats.org/drawingml/2006/main" xmlns:r="http://schemas.openxmlformats.org/officeDocument/2006/relationships" xmlns:p="http://schemas.openxmlformats.org/presentationml/2006/main">
+  <p:cSld>
+    <p:spTree>
+      <p:nvGrpSpPr>
+        <p:cNvPr id="1" name=""/>
+        <p:cNvGrpSpPr/>
+        <p:nvPr/>
+      </p:nvGrpSpPr>
+      <p:grpSpPr>
+        <a:xfrm>
+          <a:off x="0" y="0"/>
+          <a:ext cx="0" cy="0"/>
+          <a:chOff x="0" y="0"/>
+          <a:chExt cx="0" cy="0"/>
+        </a:xfrm>
+      </p:grpSpPr>
+      <p:sp>
+        <p:nvSpPr>
+          <p:cNvPr id="2" name="제목 1">
+            <a:extLst>
+              <a:ext uri="{FF2B5EF4-FFF2-40B4-BE49-F238E27FC236}">
+                <a16:creationId xmlns:a16="http://schemas.microsoft.com/office/drawing/2014/main" id="{DD5A93DC-5E95-1619-BC7B-2387E98E364B}"/>
+              </a:ext>
+            </a:extLst>
+          </p:cNvPr>
+          <p:cNvSpPr>
+            <a:spLocks noGrp="1"/>
+          </p:cNvSpPr>
+          <p:nvPr>
+            <p:ph type="title"/>
+          </p:nvPr>
+        </p:nvSpPr>
+        <p:spPr/>
+        <p:txBody>
+          <a:bodyPr/>
+          <a:lstStyle/>
+          <a:p>
+            <a:r>
+              <a:rPr lang="en-US" altLang="ko-KR" dirty="0"/>
+              <a:t>Database</a:t>
+            </a:r>
+            <a:endParaRPr lang="ko-KR" altLang="en-US" dirty="0"/>
+          </a:p>
+        </p:txBody>
+      </p:sp>
+      <p:sp>
+        <p:nvSpPr>
+          <p:cNvPr id="3" name="내용 개체 틀 2">
+            <a:extLst>
+              <a:ext uri="{FF2B5EF4-FFF2-40B4-BE49-F238E27FC236}">
+                <a16:creationId xmlns:a16="http://schemas.microsoft.com/office/drawing/2014/main" id="{8651C720-D7AA-D5EF-7571-D74E546037EB}"/>
+              </a:ext>
+            </a:extLst>
+          </p:cNvPr>
+          <p:cNvSpPr>
+            <a:spLocks noGrp="1"/>
+          </p:cNvSpPr>
+          <p:nvPr>
+            <p:ph idx="1"/>
+          </p:nvPr>
+        </p:nvSpPr>
+        <p:spPr/>
+        <p:txBody>
+          <a:bodyPr/>
+          <a:lstStyle/>
+          <a:p>
+            <a:r>
+              <a:rPr lang="en-US" altLang="ko-KR" dirty="0" err="1"/>
+              <a:t>npm</a:t>
+            </a:r>
+            <a:r>
+              <a:rPr lang="en-US" altLang="ko-KR" dirty="0"/>
+              <a:t> install –save @nestjs/typeorm </a:t>
+            </a:r>
+            <a:r>
+              <a:rPr lang="en-US" altLang="ko-KR" dirty="0" err="1"/>
+              <a:t>typeorm</a:t>
+            </a:r>
+            <a:r>
+              <a:rPr lang="en-US" altLang="ko-KR" dirty="0"/>
+              <a:t> mysql2</a:t>
+            </a:r>
+          </a:p>
+          <a:p>
+            <a:endParaRPr lang="en-US" altLang="ko-KR" dirty="0"/>
+          </a:p>
+          <a:p>
+            <a:endParaRPr lang="ko-KR" altLang="en-US" dirty="0"/>
+          </a:p>
+        </p:txBody>
+      </p:sp>
+    </p:spTree>
+    <p:extLst>
+      <p:ext uri="{BB962C8B-B14F-4D97-AF65-F5344CB8AC3E}">
+        <p14:creationId xmlns:p14="http://schemas.microsoft.com/office/powerpoint/2010/main" val="1985123182"/>
       </p:ext>
     </p:extLst>
   </p:cSld>

--- a/doc/개발환경_설치매뉴얼(Nest.JS).pptx
+++ b/doc/개발환경_설치매뉴얼(Nest.JS).pptx
@@ -8,9 +8,10 @@
     <p:sldId id="256" r:id="rId2"/>
     <p:sldId id="277" r:id="rId3"/>
     <p:sldId id="278" r:id="rId4"/>
-    <p:sldId id="280" r:id="rId5"/>
-    <p:sldId id="281" r:id="rId6"/>
-    <p:sldId id="279" r:id="rId7"/>
+    <p:sldId id="276" r:id="rId5"/>
+    <p:sldId id="280" r:id="rId6"/>
+    <p:sldId id="281" r:id="rId7"/>
+    <p:sldId id="279" r:id="rId8"/>
   </p:sldIdLst>
   <p:sldSz cx="12192000" cy="6858000"/>
   <p:notesSz cx="6858000" cy="9144000"/>
@@ -121,6 +122,7 @@
         <p14:section name="제목 없는 구역" id="{53E5FD2C-994F-4CFF-8214-B8896DC0A73D}">
           <p14:sldIdLst>
             <p14:sldId id="278"/>
+            <p14:sldId id="276"/>
             <p14:sldId id="280"/>
             <p14:sldId id="281"/>
             <p14:sldId id="279"/>
@@ -282,7 +284,7 @@
           <a:p>
             <a:fld id="{7359EE32-49FD-4EA7-9011-353EB936649F}" type="datetimeFigureOut">
               <a:rPr lang="ko-KR" altLang="en-US" smtClean="0"/>
-              <a:t>2025-09-05</a:t>
+              <a:t>2025-09-07</a:t>
             </a:fld>
             <a:endParaRPr lang="ko-KR" altLang="en-US"/>
           </a:p>
@@ -480,7 +482,7 @@
           <a:p>
             <a:fld id="{7359EE32-49FD-4EA7-9011-353EB936649F}" type="datetimeFigureOut">
               <a:rPr lang="ko-KR" altLang="en-US" smtClean="0"/>
-              <a:t>2025-09-05</a:t>
+              <a:t>2025-09-07</a:t>
             </a:fld>
             <a:endParaRPr lang="ko-KR" altLang="en-US"/>
           </a:p>
@@ -688,7 +690,7 @@
           <a:p>
             <a:fld id="{7359EE32-49FD-4EA7-9011-353EB936649F}" type="datetimeFigureOut">
               <a:rPr lang="ko-KR" altLang="en-US" smtClean="0"/>
-              <a:t>2025-09-05</a:t>
+              <a:t>2025-09-07</a:t>
             </a:fld>
             <a:endParaRPr lang="ko-KR" altLang="en-US"/>
           </a:p>
@@ -886,7 +888,7 @@
           <a:p>
             <a:fld id="{7359EE32-49FD-4EA7-9011-353EB936649F}" type="datetimeFigureOut">
               <a:rPr lang="ko-KR" altLang="en-US" smtClean="0"/>
-              <a:t>2025-09-05</a:t>
+              <a:t>2025-09-07</a:t>
             </a:fld>
             <a:endParaRPr lang="ko-KR" altLang="en-US"/>
           </a:p>
@@ -1161,7 +1163,7 @@
           <a:p>
             <a:fld id="{7359EE32-49FD-4EA7-9011-353EB936649F}" type="datetimeFigureOut">
               <a:rPr lang="ko-KR" altLang="en-US" smtClean="0"/>
-              <a:t>2025-09-05</a:t>
+              <a:t>2025-09-07</a:t>
             </a:fld>
             <a:endParaRPr lang="ko-KR" altLang="en-US"/>
           </a:p>
@@ -1426,7 +1428,7 @@
           <a:p>
             <a:fld id="{7359EE32-49FD-4EA7-9011-353EB936649F}" type="datetimeFigureOut">
               <a:rPr lang="ko-KR" altLang="en-US" smtClean="0"/>
-              <a:t>2025-09-05</a:t>
+              <a:t>2025-09-07</a:t>
             </a:fld>
             <a:endParaRPr lang="ko-KR" altLang="en-US"/>
           </a:p>
@@ -1838,7 +1840,7 @@
           <a:p>
             <a:fld id="{7359EE32-49FD-4EA7-9011-353EB936649F}" type="datetimeFigureOut">
               <a:rPr lang="ko-KR" altLang="en-US" smtClean="0"/>
-              <a:t>2025-09-05</a:t>
+              <a:t>2025-09-07</a:t>
             </a:fld>
             <a:endParaRPr lang="ko-KR" altLang="en-US"/>
           </a:p>
@@ -1979,7 +1981,7 @@
           <a:p>
             <a:fld id="{7359EE32-49FD-4EA7-9011-353EB936649F}" type="datetimeFigureOut">
               <a:rPr lang="ko-KR" altLang="en-US" smtClean="0"/>
-              <a:t>2025-09-05</a:t>
+              <a:t>2025-09-07</a:t>
             </a:fld>
             <a:endParaRPr lang="ko-KR" altLang="en-US"/>
           </a:p>
@@ -2092,7 +2094,7 @@
           <a:p>
             <a:fld id="{7359EE32-49FD-4EA7-9011-353EB936649F}" type="datetimeFigureOut">
               <a:rPr lang="ko-KR" altLang="en-US" smtClean="0"/>
-              <a:t>2025-09-05</a:t>
+              <a:t>2025-09-07</a:t>
             </a:fld>
             <a:endParaRPr lang="ko-KR" altLang="en-US"/>
           </a:p>
@@ -2403,7 +2405,7 @@
           <a:p>
             <a:fld id="{7359EE32-49FD-4EA7-9011-353EB936649F}" type="datetimeFigureOut">
               <a:rPr lang="ko-KR" altLang="en-US" smtClean="0"/>
-              <a:t>2025-09-05</a:t>
+              <a:t>2025-09-07</a:t>
             </a:fld>
             <a:endParaRPr lang="ko-KR" altLang="en-US"/>
           </a:p>
@@ -2691,7 +2693,7 @@
           <a:p>
             <a:fld id="{7359EE32-49FD-4EA7-9011-353EB936649F}" type="datetimeFigureOut">
               <a:rPr lang="ko-KR" altLang="en-US" smtClean="0"/>
-              <a:t>2025-09-05</a:t>
+              <a:t>2025-09-07</a:t>
             </a:fld>
             <a:endParaRPr lang="ko-KR" altLang="en-US"/>
           </a:p>
@@ -2932,7 +2934,7 @@
           <a:p>
             <a:fld id="{7359EE32-49FD-4EA7-9011-353EB936649F}" type="datetimeFigureOut">
               <a:rPr lang="ko-KR" altLang="en-US" smtClean="0"/>
-              <a:t>2025-09-05</a:t>
+              <a:t>2025-09-07</a:t>
             </a:fld>
             <a:endParaRPr lang="ko-KR" altLang="en-US"/>
           </a:p>
@@ -3774,7 +3776,7 @@
           <p:cNvPr id="2" name="제목 1">
             <a:extLst>
               <a:ext uri="{FF2B5EF4-FFF2-40B4-BE49-F238E27FC236}">
-                <a16:creationId xmlns:a16="http://schemas.microsoft.com/office/drawing/2014/main" id="{12C7B522-6772-82D1-965B-52D8C9C57A7A}"/>
+                <a16:creationId xmlns:a16="http://schemas.microsoft.com/office/drawing/2014/main" id="{C4C31A83-235A-D249-0815-11BFDE45EF1C}"/>
               </a:ext>
             </a:extLst>
           </p:cNvPr>
@@ -3791,8 +3793,8 @@
           <a:lstStyle/>
           <a:p>
             <a:r>
-              <a:rPr lang="en-US" altLang="ko-KR" dirty="0"/>
-              <a:t>Configuration</a:t>
+              <a:rPr lang="en-US" altLang="ko-KR" dirty="0" err="1"/>
+              <a:t>NestJS</a:t>
             </a:r>
             <a:endParaRPr lang="ko-KR" altLang="en-US" dirty="0"/>
           </a:p>
@@ -3803,7 +3805,7 @@
           <p:cNvPr id="3" name="내용 개체 틀 2">
             <a:extLst>
               <a:ext uri="{FF2B5EF4-FFF2-40B4-BE49-F238E27FC236}">
-                <a16:creationId xmlns:a16="http://schemas.microsoft.com/office/drawing/2014/main" id="{4882C45D-ABB1-6EFC-EEA5-A11D0A2000EF}"/>
+                <a16:creationId xmlns:a16="http://schemas.microsoft.com/office/drawing/2014/main" id="{373CC9B8-F768-BBB9-2725-03ED4DE43A71}"/>
               </a:ext>
             </a:extLst>
           </p:cNvPr>
@@ -3816,12 +3818,17 @@
         </p:nvSpPr>
         <p:spPr/>
         <p:txBody>
-          <a:bodyPr/>
-          <a:lstStyle/>
-          <a:p>
-            <a:r>
-              <a:rPr lang="en-US" altLang="ko-KR" dirty="0"/>
-              <a:t>$</a:t>
+          <a:bodyPr>
+            <a:normAutofit fontScale="32500" lnSpcReduction="20000"/>
+          </a:bodyPr>
+          <a:lstStyle/>
+          <a:p>
+            <a:pPr marL="0" indent="0">
+              <a:buNone/>
+            </a:pPr>
+            <a:r>
+              <a:rPr lang="en-US" altLang="ko-KR" dirty="0"/>
+              <a:t>$ </a:t>
             </a:r>
             <a:r>
               <a:rPr lang="en-US" altLang="ko-KR" dirty="0" err="1"/>
@@ -3829,195 +3836,234 @@
             </a:r>
             <a:r>
               <a:rPr lang="en-US" altLang="ko-KR" dirty="0"/>
-              <a:t> install –save @nestjs/config</a:t>
-            </a:r>
-            <a:endParaRPr lang="ko-KR" altLang="en-US" dirty="0"/>
-          </a:p>
-        </p:txBody>
-      </p:sp>
-      <p:sp>
-        <p:nvSpPr>
-          <p:cNvPr id="4" name="직사각형 3">
-            <a:extLst>
-              <a:ext uri="{FF2B5EF4-FFF2-40B4-BE49-F238E27FC236}">
-                <a16:creationId xmlns:a16="http://schemas.microsoft.com/office/drawing/2014/main" id="{704D04A9-CFFE-37C2-EC08-EE097F2CB77D}"/>
-              </a:ext>
-            </a:extLst>
-          </p:cNvPr>
-          <p:cNvSpPr/>
-          <p:nvPr/>
-        </p:nvSpPr>
-        <p:spPr>
-          <a:xfrm>
-            <a:off x="838200" y="2622550"/>
-            <a:ext cx="6267450" cy="4064000"/>
-          </a:xfrm>
-          <a:prstGeom prst="rect">
-            <a:avLst/>
-          </a:prstGeom>
-        </p:spPr>
-        <p:style>
-          <a:lnRef idx="2">
-            <a:schemeClr val="dk1"/>
-          </a:lnRef>
-          <a:fillRef idx="1">
-            <a:schemeClr val="lt1"/>
-          </a:fillRef>
-          <a:effectRef idx="0">
-            <a:schemeClr val="dk1"/>
-          </a:effectRef>
-          <a:fontRef idx="minor">
-            <a:schemeClr val="dk1"/>
-          </a:fontRef>
-        </p:style>
-        <p:txBody>
-          <a:bodyPr rtlCol="0" anchor="ctr"/>
-          <a:lstStyle/>
-          <a:p>
-            <a:r>
-              <a:rPr lang="en-US" altLang="ko-KR" dirty="0"/>
-              <a:t>import { Module } from '@</a:t>
+              <a:t> I –g @nestjs/cli</a:t>
+            </a:r>
+          </a:p>
+          <a:p>
+            <a:pPr marL="0" indent="0">
+              <a:buNone/>
+            </a:pPr>
+            <a:r>
+              <a:rPr lang="en-US" altLang="ko-KR" dirty="0"/>
+              <a:t>$ nest new {project-name}</a:t>
+            </a:r>
+          </a:p>
+          <a:p>
+            <a:pPr marL="0" indent="0">
+              <a:buNone/>
+            </a:pPr>
+            <a:endParaRPr lang="en-US" altLang="ko-KR" dirty="0"/>
+          </a:p>
+          <a:p>
+            <a:pPr marL="0" indent="0">
+              <a:buNone/>
+            </a:pPr>
+            <a:r>
+              <a:rPr lang="en-US" altLang="ko-KR" dirty="0"/>
+              <a:t>├── README.md</a:t>
+            </a:r>
+          </a:p>
+          <a:p>
+            <a:pPr marL="0" indent="0">
+              <a:buNone/>
+            </a:pPr>
+            <a:r>
+              <a:rPr lang="en-US" altLang="ko-KR" dirty="0"/>
+              <a:t>├── nest-</a:t>
             </a:r>
             <a:r>
               <a:rPr lang="en-US" altLang="ko-KR" dirty="0" err="1"/>
-              <a:t>nestjs</a:t>
-            </a:r>
-            <a:r>
-              <a:rPr lang="en-US" altLang="ko-KR" dirty="0"/>
-              <a:t>/common';</a:t>
-            </a:r>
-          </a:p>
-          <a:p>
-            <a:r>
-              <a:rPr lang="en-US" altLang="ko-KR" dirty="0"/>
-              <a:t>import { </a:t>
+              <a:t>cli.json</a:t>
+            </a:r>
+            <a:endParaRPr lang="en-US" altLang="ko-KR" dirty="0"/>
+          </a:p>
+          <a:p>
+            <a:pPr marL="0" indent="0">
+              <a:buNone/>
+            </a:pPr>
+            <a:r>
+              <a:rPr lang="en-US" altLang="ko-KR" dirty="0"/>
+              <a:t>├── </a:t>
             </a:r>
             <a:r>
               <a:rPr lang="en-US" altLang="ko-KR" dirty="0" err="1"/>
-              <a:t>ConfigModule</a:t>
-            </a:r>
-            <a:r>
-              <a:rPr lang="en-US" altLang="ko-KR" dirty="0"/>
-              <a:t> } from '@</a:t>
+              <a:t>node_modules</a:t>
+            </a:r>
+            <a:endParaRPr lang="en-US" altLang="ko-KR" dirty="0"/>
+          </a:p>
+          <a:p>
+            <a:pPr marL="0" indent="0">
+              <a:buNone/>
+            </a:pPr>
+            <a:r>
+              <a:rPr lang="en-US" altLang="ko-KR" dirty="0"/>
+              <a:t>├── package-</a:t>
             </a:r>
             <a:r>
               <a:rPr lang="en-US" altLang="ko-KR" dirty="0" err="1"/>
-              <a:t>nestjs</a:t>
-            </a:r>
-            <a:r>
-              <a:rPr lang="en-US" altLang="ko-KR" dirty="0"/>
-              <a:t>/config';</a:t>
-            </a:r>
-          </a:p>
-          <a:p>
+              <a:t>lock.json</a:t>
+            </a:r>
             <a:endParaRPr lang="en-US" altLang="ko-KR" dirty="0"/>
           </a:p>
           <a:p>
-            <a:r>
-              <a:rPr lang="en-US" altLang="ko-KR" dirty="0"/>
-              <a:t>@Module({</a:t>
-            </a:r>
-          </a:p>
-          <a:p>
-            <a:r>
-              <a:rPr lang="en-US" altLang="ko-KR" dirty="0"/>
-              <a:t>  imports: [</a:t>
+            <a:pPr marL="0" indent="0">
+              <a:buNone/>
+            </a:pPr>
+            <a:r>
+              <a:rPr lang="en-US" altLang="ko-KR" dirty="0"/>
+              <a:t>├── </a:t>
             </a:r>
             <a:r>
               <a:rPr lang="en-US" altLang="ko-KR" dirty="0" err="1"/>
-              <a:t>ConfigModule.forRoot</a:t>
-            </a:r>
-            <a:r>
-              <a:rPr lang="en-US" altLang="ko-KR" dirty="0"/>
-              <a:t>({</a:t>
-            </a:r>
-          </a:p>
-          <a:p>
-            <a:r>
-              <a:rPr lang="en-US" altLang="ko-KR" dirty="0"/>
-              <a:t>	     cache: true,</a:t>
-            </a:r>
-          </a:p>
-          <a:p>
-            <a:r>
-              <a:rPr lang="en-US" altLang="ko-KR" dirty="0"/>
-              <a:t>	     </a:t>
+              <a:t>package.json</a:t>
+            </a:r>
+            <a:endParaRPr lang="en-US" altLang="ko-KR" dirty="0"/>
+          </a:p>
+          <a:p>
+            <a:pPr marL="0" indent="0">
+              <a:buNone/>
+            </a:pPr>
+            <a:r>
+              <a:rPr lang="en-US" altLang="ko-KR" dirty="0"/>
+              <a:t>├── </a:t>
             </a:r>
             <a:r>
               <a:rPr lang="en-US" altLang="ko-KR" dirty="0" err="1"/>
-              <a:t>isGlobal</a:t>
-            </a:r>
-            <a:r>
-              <a:rPr lang="en-US" altLang="ko-KR" dirty="0"/>
-              <a:t>: true,</a:t>
-            </a:r>
-          </a:p>
-          <a:p>
-            <a:r>
-              <a:rPr lang="en-US" altLang="ko-KR" dirty="0"/>
-              <a:t>	   })],</a:t>
-            </a:r>
-          </a:p>
-          <a:p>
-            <a:pPr fontAlgn="base" latinLnBrk="0"/>
-            <a:r>
-              <a:rPr lang="en-US" altLang="ko-KR" dirty="0"/>
-              <a:t>  controllers: [</a:t>
+              <a:t>src</a:t>
+            </a:r>
+            <a:endParaRPr lang="en-US" altLang="ko-KR" dirty="0"/>
+          </a:p>
+          <a:p>
+            <a:pPr marL="0" indent="0">
+              <a:buNone/>
+            </a:pPr>
+            <a:r>
+              <a:rPr lang="en-US" altLang="ko-KR" dirty="0"/>
+              <a:t>│   ├── </a:t>
             </a:r>
             <a:r>
               <a:rPr lang="en-US" altLang="ko-KR" dirty="0" err="1"/>
-              <a:t>AppController</a:t>
-            </a:r>
-            <a:r>
-              <a:rPr lang="en-US" altLang="ko-KR" dirty="0"/>
-              <a:t>],</a:t>
-            </a:r>
-          </a:p>
-          <a:p>
-            <a:pPr fontAlgn="base" latinLnBrk="0"/>
-            <a:r>
-              <a:rPr lang="en-US" altLang="ko-KR" dirty="0"/>
-              <a:t>  providers: [</a:t>
+              <a:t>app.controller.spec.ts</a:t>
+            </a:r>
+            <a:endParaRPr lang="en-US" altLang="ko-KR" dirty="0"/>
+          </a:p>
+          <a:p>
+            <a:pPr marL="0" indent="0">
+              <a:buNone/>
+            </a:pPr>
+            <a:r>
+              <a:rPr lang="en-US" altLang="ko-KR" dirty="0"/>
+              <a:t>│   ├── </a:t>
             </a:r>
             <a:r>
               <a:rPr lang="en-US" altLang="ko-KR" dirty="0" err="1"/>
-              <a:t>AppService</a:t>
-            </a:r>
-            <a:r>
-              <a:rPr lang="en-US" altLang="ko-KR" dirty="0"/>
-              <a:t>],</a:t>
-            </a:r>
-          </a:p>
-          <a:p>
-            <a:r>
-              <a:rPr lang="en-US" altLang="ko-KR" dirty="0"/>
-              <a:t>})</a:t>
-            </a:r>
-          </a:p>
-          <a:p>
+              <a:t>app.controller.ts</a:t>
+            </a:r>
             <a:endParaRPr lang="en-US" altLang="ko-KR" dirty="0"/>
           </a:p>
           <a:p>
-            <a:r>
-              <a:rPr lang="en-US" altLang="ko-KR" dirty="0"/>
-              <a:t>export class </a:t>
+            <a:pPr marL="0" indent="0">
+              <a:buNone/>
+            </a:pPr>
+            <a:r>
+              <a:rPr lang="en-US" altLang="ko-KR" dirty="0"/>
+              <a:t>│   ├── </a:t>
             </a:r>
             <a:r>
               <a:rPr lang="en-US" altLang="ko-KR" dirty="0" err="1"/>
-              <a:t>AppModule</a:t>
-            </a:r>
-            <a:r>
-              <a:rPr lang="en-US" altLang="ko-KR" dirty="0"/>
-              <a:t> {}</a:t>
-            </a:r>
-            <a:endParaRPr lang="ko-KR" altLang="en-US" dirty="0"/>
+              <a:t>app.module.ts</a:t>
+            </a:r>
+            <a:endParaRPr lang="en-US" altLang="ko-KR" dirty="0"/>
+          </a:p>
+          <a:p>
+            <a:pPr marL="0" indent="0">
+              <a:buNone/>
+            </a:pPr>
+            <a:r>
+              <a:rPr lang="en-US" altLang="ko-KR" dirty="0"/>
+              <a:t>│   ├── </a:t>
+            </a:r>
+            <a:r>
+              <a:rPr lang="en-US" altLang="ko-KR" dirty="0" err="1"/>
+              <a:t>app.service.ts</a:t>
+            </a:r>
+            <a:endParaRPr lang="en-US" altLang="ko-KR" dirty="0"/>
+          </a:p>
+          <a:p>
+            <a:pPr marL="0" indent="0">
+              <a:buNone/>
+            </a:pPr>
+            <a:r>
+              <a:rPr lang="en-US" altLang="ko-KR" dirty="0"/>
+              <a:t>│   └── </a:t>
+            </a:r>
+            <a:r>
+              <a:rPr lang="en-US" altLang="ko-KR" dirty="0" err="1"/>
+              <a:t>main.ts</a:t>
+            </a:r>
+            <a:endParaRPr lang="en-US" altLang="ko-KR" dirty="0"/>
+          </a:p>
+          <a:p>
+            <a:pPr marL="0" indent="0">
+              <a:buNone/>
+            </a:pPr>
+            <a:r>
+              <a:rPr lang="en-US" altLang="ko-KR" dirty="0"/>
+              <a:t>├── test</a:t>
+            </a:r>
+          </a:p>
+          <a:p>
+            <a:pPr marL="0" indent="0">
+              <a:buNone/>
+            </a:pPr>
+            <a:r>
+              <a:rPr lang="en-US" altLang="ko-KR" dirty="0"/>
+              <a:t>│   ├── app.e2e-spec.ts</a:t>
+            </a:r>
+          </a:p>
+          <a:p>
+            <a:pPr marL="0" indent="0">
+              <a:buNone/>
+            </a:pPr>
+            <a:r>
+              <a:rPr lang="en-US" altLang="ko-KR" dirty="0"/>
+              <a:t>│   └── jest-e2e.json</a:t>
+            </a:r>
+          </a:p>
+          <a:p>
+            <a:pPr marL="0" indent="0">
+              <a:buNone/>
+            </a:pPr>
+            <a:r>
+              <a:rPr lang="en-US" altLang="ko-KR" dirty="0"/>
+              <a:t>├── </a:t>
+            </a:r>
+            <a:r>
+              <a:rPr lang="en-US" altLang="ko-KR" dirty="0" err="1"/>
+              <a:t>tsconfig.build.json</a:t>
+            </a:r>
+            <a:endParaRPr lang="en-US" altLang="ko-KR" dirty="0"/>
+          </a:p>
+          <a:p>
+            <a:pPr marL="0" indent="0">
+              <a:buNone/>
+            </a:pPr>
+            <a:r>
+              <a:rPr lang="en-US" altLang="ko-KR" dirty="0"/>
+              <a:t>└── </a:t>
+            </a:r>
+            <a:r>
+              <a:rPr lang="en-US" altLang="ko-KR" dirty="0" err="1"/>
+              <a:t>tsconfig.json</a:t>
+            </a:r>
+            <a:endParaRPr lang="en-US" altLang="ko-KR" dirty="0"/>
           </a:p>
         </p:txBody>
       </p:sp>
     </p:spTree>
     <p:extLst>
       <p:ext uri="{BB962C8B-B14F-4D97-AF65-F5344CB8AC3E}">
-        <p14:creationId xmlns:p14="http://schemas.microsoft.com/office/powerpoint/2010/main" val="658138302"/>
+        <p14:creationId xmlns:p14="http://schemas.microsoft.com/office/powerpoint/2010/main" val="754481125"/>
       </p:ext>
     </p:extLst>
   </p:cSld>
@@ -4049,6 +4095,281 @@
           <p:cNvPr id="2" name="제목 1">
             <a:extLst>
               <a:ext uri="{FF2B5EF4-FFF2-40B4-BE49-F238E27FC236}">
+                <a16:creationId xmlns:a16="http://schemas.microsoft.com/office/drawing/2014/main" id="{12C7B522-6772-82D1-965B-52D8C9C57A7A}"/>
+              </a:ext>
+            </a:extLst>
+          </p:cNvPr>
+          <p:cNvSpPr>
+            <a:spLocks noGrp="1"/>
+          </p:cNvSpPr>
+          <p:nvPr>
+            <p:ph type="title"/>
+          </p:nvPr>
+        </p:nvSpPr>
+        <p:spPr/>
+        <p:txBody>
+          <a:bodyPr/>
+          <a:lstStyle/>
+          <a:p>
+            <a:r>
+              <a:rPr lang="en-US" altLang="ko-KR" dirty="0"/>
+              <a:t>Configuration</a:t>
+            </a:r>
+            <a:endParaRPr lang="ko-KR" altLang="en-US" dirty="0"/>
+          </a:p>
+        </p:txBody>
+      </p:sp>
+      <p:sp>
+        <p:nvSpPr>
+          <p:cNvPr id="3" name="내용 개체 틀 2">
+            <a:extLst>
+              <a:ext uri="{FF2B5EF4-FFF2-40B4-BE49-F238E27FC236}">
+                <a16:creationId xmlns:a16="http://schemas.microsoft.com/office/drawing/2014/main" id="{4882C45D-ABB1-6EFC-EEA5-A11D0A2000EF}"/>
+              </a:ext>
+            </a:extLst>
+          </p:cNvPr>
+          <p:cNvSpPr>
+            <a:spLocks noGrp="1"/>
+          </p:cNvSpPr>
+          <p:nvPr>
+            <p:ph idx="1"/>
+          </p:nvPr>
+        </p:nvSpPr>
+        <p:spPr/>
+        <p:txBody>
+          <a:bodyPr/>
+          <a:lstStyle/>
+          <a:p>
+            <a:r>
+              <a:rPr lang="en-US" altLang="ko-KR" dirty="0"/>
+              <a:t>$</a:t>
+            </a:r>
+            <a:r>
+              <a:rPr lang="en-US" altLang="ko-KR" dirty="0" err="1"/>
+              <a:t>npm</a:t>
+            </a:r>
+            <a:r>
+              <a:rPr lang="en-US" altLang="ko-KR" dirty="0"/>
+              <a:t> install –save @nestjs/config</a:t>
+            </a:r>
+            <a:endParaRPr lang="ko-KR" altLang="en-US" dirty="0"/>
+          </a:p>
+        </p:txBody>
+      </p:sp>
+      <p:sp>
+        <p:nvSpPr>
+          <p:cNvPr id="4" name="직사각형 3">
+            <a:extLst>
+              <a:ext uri="{FF2B5EF4-FFF2-40B4-BE49-F238E27FC236}">
+                <a16:creationId xmlns:a16="http://schemas.microsoft.com/office/drawing/2014/main" id="{704D04A9-CFFE-37C2-EC08-EE097F2CB77D}"/>
+              </a:ext>
+            </a:extLst>
+          </p:cNvPr>
+          <p:cNvSpPr/>
+          <p:nvPr/>
+        </p:nvSpPr>
+        <p:spPr>
+          <a:xfrm>
+            <a:off x="838200" y="2622550"/>
+            <a:ext cx="6267450" cy="4064000"/>
+          </a:xfrm>
+          <a:prstGeom prst="rect">
+            <a:avLst/>
+          </a:prstGeom>
+        </p:spPr>
+        <p:style>
+          <a:lnRef idx="2">
+            <a:schemeClr val="dk1"/>
+          </a:lnRef>
+          <a:fillRef idx="1">
+            <a:schemeClr val="lt1"/>
+          </a:fillRef>
+          <a:effectRef idx="0">
+            <a:schemeClr val="dk1"/>
+          </a:effectRef>
+          <a:fontRef idx="minor">
+            <a:schemeClr val="dk1"/>
+          </a:fontRef>
+        </p:style>
+        <p:txBody>
+          <a:bodyPr rtlCol="0" anchor="ctr"/>
+          <a:lstStyle/>
+          <a:p>
+            <a:r>
+              <a:rPr lang="en-US" altLang="ko-KR" dirty="0"/>
+              <a:t>import { Module } from '@</a:t>
+            </a:r>
+            <a:r>
+              <a:rPr lang="en-US" altLang="ko-KR" dirty="0" err="1"/>
+              <a:t>nestjs</a:t>
+            </a:r>
+            <a:r>
+              <a:rPr lang="en-US" altLang="ko-KR" dirty="0"/>
+              <a:t>/common';</a:t>
+            </a:r>
+          </a:p>
+          <a:p>
+            <a:r>
+              <a:rPr lang="en-US" altLang="ko-KR" dirty="0"/>
+              <a:t>import { </a:t>
+            </a:r>
+            <a:r>
+              <a:rPr lang="en-US" altLang="ko-KR" dirty="0" err="1"/>
+              <a:t>ConfigModule</a:t>
+            </a:r>
+            <a:r>
+              <a:rPr lang="en-US" altLang="ko-KR" dirty="0"/>
+              <a:t> } from '@</a:t>
+            </a:r>
+            <a:r>
+              <a:rPr lang="en-US" altLang="ko-KR" dirty="0" err="1"/>
+              <a:t>nestjs</a:t>
+            </a:r>
+            <a:r>
+              <a:rPr lang="en-US" altLang="ko-KR" dirty="0"/>
+              <a:t>/config';</a:t>
+            </a:r>
+          </a:p>
+          <a:p>
+            <a:endParaRPr lang="en-US" altLang="ko-KR" dirty="0"/>
+          </a:p>
+          <a:p>
+            <a:r>
+              <a:rPr lang="en-US" altLang="ko-KR" dirty="0"/>
+              <a:t>@Module({</a:t>
+            </a:r>
+          </a:p>
+          <a:p>
+            <a:r>
+              <a:rPr lang="en-US" altLang="ko-KR" dirty="0"/>
+              <a:t>  imports: [</a:t>
+            </a:r>
+            <a:r>
+              <a:rPr lang="en-US" altLang="ko-KR" dirty="0" err="1"/>
+              <a:t>ConfigModule.forRoot</a:t>
+            </a:r>
+            <a:r>
+              <a:rPr lang="en-US" altLang="ko-KR" dirty="0"/>
+              <a:t>({</a:t>
+            </a:r>
+          </a:p>
+          <a:p>
+            <a:r>
+              <a:rPr lang="en-US" altLang="ko-KR" dirty="0"/>
+              <a:t>	     cache: true,</a:t>
+            </a:r>
+          </a:p>
+          <a:p>
+            <a:r>
+              <a:rPr lang="en-US" altLang="ko-KR" dirty="0"/>
+              <a:t>	     </a:t>
+            </a:r>
+            <a:r>
+              <a:rPr lang="en-US" altLang="ko-KR" dirty="0" err="1"/>
+              <a:t>isGlobal</a:t>
+            </a:r>
+            <a:r>
+              <a:rPr lang="en-US" altLang="ko-KR" dirty="0"/>
+              <a:t>: true,</a:t>
+            </a:r>
+          </a:p>
+          <a:p>
+            <a:r>
+              <a:rPr lang="en-US" altLang="ko-KR" dirty="0"/>
+              <a:t>	   })],</a:t>
+            </a:r>
+          </a:p>
+          <a:p>
+            <a:pPr fontAlgn="base" latinLnBrk="0"/>
+            <a:r>
+              <a:rPr lang="en-US" altLang="ko-KR" dirty="0"/>
+              <a:t>  controllers: [</a:t>
+            </a:r>
+            <a:r>
+              <a:rPr lang="en-US" altLang="ko-KR" dirty="0" err="1"/>
+              <a:t>AppController</a:t>
+            </a:r>
+            <a:r>
+              <a:rPr lang="en-US" altLang="ko-KR" dirty="0"/>
+              <a:t>],</a:t>
+            </a:r>
+          </a:p>
+          <a:p>
+            <a:pPr fontAlgn="base" latinLnBrk="0"/>
+            <a:r>
+              <a:rPr lang="en-US" altLang="ko-KR" dirty="0"/>
+              <a:t>  providers: [</a:t>
+            </a:r>
+            <a:r>
+              <a:rPr lang="en-US" altLang="ko-KR" dirty="0" err="1"/>
+              <a:t>AppService</a:t>
+            </a:r>
+            <a:r>
+              <a:rPr lang="en-US" altLang="ko-KR" dirty="0"/>
+              <a:t>],</a:t>
+            </a:r>
+          </a:p>
+          <a:p>
+            <a:r>
+              <a:rPr lang="en-US" altLang="ko-KR" dirty="0"/>
+              <a:t>})</a:t>
+            </a:r>
+          </a:p>
+          <a:p>
+            <a:endParaRPr lang="en-US" altLang="ko-KR" dirty="0"/>
+          </a:p>
+          <a:p>
+            <a:r>
+              <a:rPr lang="en-US" altLang="ko-KR" dirty="0"/>
+              <a:t>export class </a:t>
+            </a:r>
+            <a:r>
+              <a:rPr lang="en-US" altLang="ko-KR" dirty="0" err="1"/>
+              <a:t>AppModule</a:t>
+            </a:r>
+            <a:r>
+              <a:rPr lang="en-US" altLang="ko-KR" dirty="0"/>
+              <a:t> {}</a:t>
+            </a:r>
+            <a:endParaRPr lang="ko-KR" altLang="en-US" dirty="0"/>
+          </a:p>
+        </p:txBody>
+      </p:sp>
+    </p:spTree>
+    <p:extLst>
+      <p:ext uri="{BB962C8B-B14F-4D97-AF65-F5344CB8AC3E}">
+        <p14:creationId xmlns:p14="http://schemas.microsoft.com/office/powerpoint/2010/main" val="658138302"/>
+      </p:ext>
+    </p:extLst>
+  </p:cSld>
+  <p:clrMapOvr>
+    <a:masterClrMapping/>
+  </p:clrMapOvr>
+</p:sld>
+</file>
+
+<file path=ppt/slides/slide6.xml><?xml version="1.0" encoding="utf-8"?>
+<p:sld xmlns:a="http://schemas.openxmlformats.org/drawingml/2006/main" xmlns:r="http://schemas.openxmlformats.org/officeDocument/2006/relationships" xmlns:p="http://schemas.openxmlformats.org/presentationml/2006/main">
+  <p:cSld>
+    <p:spTree>
+      <p:nvGrpSpPr>
+        <p:cNvPr id="1" name=""/>
+        <p:cNvGrpSpPr/>
+        <p:nvPr/>
+      </p:nvGrpSpPr>
+      <p:grpSpPr>
+        <a:xfrm>
+          <a:off x="0" y="0"/>
+          <a:ext cx="0" cy="0"/>
+          <a:chOff x="0" y="0"/>
+          <a:chExt cx="0" cy="0"/>
+        </a:xfrm>
+      </p:grpSpPr>
+      <p:sp>
+        <p:nvSpPr>
+          <p:cNvPr id="2" name="제목 1">
+            <a:extLst>
+              <a:ext uri="{FF2B5EF4-FFF2-40B4-BE49-F238E27FC236}">
                 <a16:creationId xmlns:a16="http://schemas.microsoft.com/office/drawing/2014/main" id="{27986D15-41C7-1CCB-101C-6202C2C74E35}"/>
               </a:ext>
             </a:extLst>
@@ -4157,7 +4478,7 @@
 </p:sld>
 </file>
 
-<file path=ppt/slides/slide6.xml><?xml version="1.0" encoding="utf-8"?>
+<file path=ppt/slides/slide7.xml><?xml version="1.0" encoding="utf-8"?>
 <p:sld xmlns:a="http://schemas.openxmlformats.org/drawingml/2006/main" xmlns:r="http://schemas.openxmlformats.org/officeDocument/2006/relationships" xmlns:p="http://schemas.openxmlformats.org/presentationml/2006/main">
   <p:cSld>
     <p:spTree>

--- a/doc/개발환경_설치매뉴얼(Nest.JS).pptx
+++ b/doc/개발환경_설치매뉴얼(Nest.JS).pptx
@@ -284,7 +284,7 @@
           <a:p>
             <a:fld id="{7359EE32-49FD-4EA7-9011-353EB936649F}" type="datetimeFigureOut">
               <a:rPr lang="ko-KR" altLang="en-US" smtClean="0"/>
-              <a:t>2025-09-07</a:t>
+              <a:t>2025-09-08</a:t>
             </a:fld>
             <a:endParaRPr lang="ko-KR" altLang="en-US"/>
           </a:p>
@@ -482,7 +482,7 @@
           <a:p>
             <a:fld id="{7359EE32-49FD-4EA7-9011-353EB936649F}" type="datetimeFigureOut">
               <a:rPr lang="ko-KR" altLang="en-US" smtClean="0"/>
-              <a:t>2025-09-07</a:t>
+              <a:t>2025-09-08</a:t>
             </a:fld>
             <a:endParaRPr lang="ko-KR" altLang="en-US"/>
           </a:p>
@@ -690,7 +690,7 @@
           <a:p>
             <a:fld id="{7359EE32-49FD-4EA7-9011-353EB936649F}" type="datetimeFigureOut">
               <a:rPr lang="ko-KR" altLang="en-US" smtClean="0"/>
-              <a:t>2025-09-07</a:t>
+              <a:t>2025-09-08</a:t>
             </a:fld>
             <a:endParaRPr lang="ko-KR" altLang="en-US"/>
           </a:p>
@@ -888,7 +888,7 @@
           <a:p>
             <a:fld id="{7359EE32-49FD-4EA7-9011-353EB936649F}" type="datetimeFigureOut">
               <a:rPr lang="ko-KR" altLang="en-US" smtClean="0"/>
-              <a:t>2025-09-07</a:t>
+              <a:t>2025-09-08</a:t>
             </a:fld>
             <a:endParaRPr lang="ko-KR" altLang="en-US"/>
           </a:p>
@@ -1163,7 +1163,7 @@
           <a:p>
             <a:fld id="{7359EE32-49FD-4EA7-9011-353EB936649F}" type="datetimeFigureOut">
               <a:rPr lang="ko-KR" altLang="en-US" smtClean="0"/>
-              <a:t>2025-09-07</a:t>
+              <a:t>2025-09-08</a:t>
             </a:fld>
             <a:endParaRPr lang="ko-KR" altLang="en-US"/>
           </a:p>
@@ -1428,7 +1428,7 @@
           <a:p>
             <a:fld id="{7359EE32-49FD-4EA7-9011-353EB936649F}" type="datetimeFigureOut">
               <a:rPr lang="ko-KR" altLang="en-US" smtClean="0"/>
-              <a:t>2025-09-07</a:t>
+              <a:t>2025-09-08</a:t>
             </a:fld>
             <a:endParaRPr lang="ko-KR" altLang="en-US"/>
           </a:p>
@@ -1840,7 +1840,7 @@
           <a:p>
             <a:fld id="{7359EE32-49FD-4EA7-9011-353EB936649F}" type="datetimeFigureOut">
               <a:rPr lang="ko-KR" altLang="en-US" smtClean="0"/>
-              <a:t>2025-09-07</a:t>
+              <a:t>2025-09-08</a:t>
             </a:fld>
             <a:endParaRPr lang="ko-KR" altLang="en-US"/>
           </a:p>
@@ -1981,7 +1981,7 @@
           <a:p>
             <a:fld id="{7359EE32-49FD-4EA7-9011-353EB936649F}" type="datetimeFigureOut">
               <a:rPr lang="ko-KR" altLang="en-US" smtClean="0"/>
-              <a:t>2025-09-07</a:t>
+              <a:t>2025-09-08</a:t>
             </a:fld>
             <a:endParaRPr lang="ko-KR" altLang="en-US"/>
           </a:p>
@@ -2094,7 +2094,7 @@
           <a:p>
             <a:fld id="{7359EE32-49FD-4EA7-9011-353EB936649F}" type="datetimeFigureOut">
               <a:rPr lang="ko-KR" altLang="en-US" smtClean="0"/>
-              <a:t>2025-09-07</a:t>
+              <a:t>2025-09-08</a:t>
             </a:fld>
             <a:endParaRPr lang="ko-KR" altLang="en-US"/>
           </a:p>
@@ -2405,7 +2405,7 @@
           <a:p>
             <a:fld id="{7359EE32-49FD-4EA7-9011-353EB936649F}" type="datetimeFigureOut">
               <a:rPr lang="ko-KR" altLang="en-US" smtClean="0"/>
-              <a:t>2025-09-07</a:t>
+              <a:t>2025-09-08</a:t>
             </a:fld>
             <a:endParaRPr lang="ko-KR" altLang="en-US"/>
           </a:p>
@@ -2693,7 +2693,7 @@
           <a:p>
             <a:fld id="{7359EE32-49FD-4EA7-9011-353EB936649F}" type="datetimeFigureOut">
               <a:rPr lang="ko-KR" altLang="en-US" smtClean="0"/>
-              <a:t>2025-09-07</a:t>
+              <a:t>2025-09-08</a:t>
             </a:fld>
             <a:endParaRPr lang="ko-KR" altLang="en-US"/>
           </a:p>
@@ -2934,7 +2934,7 @@
           <a:p>
             <a:fld id="{7359EE32-49FD-4EA7-9011-353EB936649F}" type="datetimeFigureOut">
               <a:rPr lang="ko-KR" altLang="en-US" smtClean="0"/>
-              <a:t>2025-09-07</a:t>
+              <a:t>2025-09-08</a:t>
             </a:fld>
             <a:endParaRPr lang="ko-KR" altLang="en-US"/>
           </a:p>
@@ -3730,14 +3730,13 @@
               <a:t>애플리케이션의 </a:t>
             </a:r>
             <a:r>
-              <a:rPr lang="ko-KR" altLang="en-US" err="1"/>
+              <a:rPr lang="ko-KR" altLang="en-US" dirty="0" err="1"/>
               <a:t>진입점</a:t>
             </a:r>
             <a:r>
-              <a:rPr lang="ko-KR" altLang="en-US"/>
+              <a:rPr lang="ko-KR" altLang="en-US" dirty="0"/>
               <a:t> 역할을 하는 파일</a:t>
             </a:r>
-            <a:endParaRPr lang="ko-KR" altLang="en-US" dirty="0"/>
           </a:p>
         </p:txBody>
       </p:sp>
@@ -3827,15 +3826,15 @@
               <a:buNone/>
             </a:pPr>
             <a:r>
-              <a:rPr lang="en-US" altLang="ko-KR" dirty="0"/>
+              <a:rPr lang="en-US" altLang="ko-KR" b="1" dirty="0"/>
               <a:t>$ </a:t>
             </a:r>
             <a:r>
-              <a:rPr lang="en-US" altLang="ko-KR" dirty="0" err="1"/>
+              <a:rPr lang="en-US" altLang="ko-KR" b="1" dirty="0" err="1"/>
               <a:t>npm</a:t>
             </a:r>
             <a:r>
-              <a:rPr lang="en-US" altLang="ko-KR" dirty="0"/>
+              <a:rPr lang="en-US" altLang="ko-KR" b="1" dirty="0"/>
               <a:t> I –g @nestjs/cli</a:t>
             </a:r>
           </a:p>
@@ -3844,7 +3843,7 @@
               <a:buNone/>
             </a:pPr>
             <a:r>
-              <a:rPr lang="en-US" altLang="ko-KR" dirty="0"/>
+              <a:rPr lang="en-US" altLang="ko-KR" b="1" dirty="0"/>
               <a:t>$ nest new {project-name}</a:t>
             </a:r>
           </a:p>
@@ -3859,7 +3858,7 @@
               <a:buNone/>
             </a:pPr>
             <a:r>
-              <a:rPr lang="en-US" altLang="ko-KR" dirty="0"/>
+              <a:rPr lang="en-US" altLang="ko-KR" b="1" dirty="0"/>
               <a:t>├── README.md</a:t>
             </a:r>
           </a:p>
@@ -3868,147 +3867,147 @@
               <a:buNone/>
             </a:pPr>
             <a:r>
-              <a:rPr lang="en-US" altLang="ko-KR" dirty="0"/>
+              <a:rPr lang="en-US" altLang="ko-KR" b="1" dirty="0"/>
               <a:t>├── nest-</a:t>
             </a:r>
             <a:r>
-              <a:rPr lang="en-US" altLang="ko-KR" dirty="0" err="1"/>
+              <a:rPr lang="en-US" altLang="ko-KR" b="1" dirty="0" err="1"/>
               <a:t>cli.json</a:t>
             </a:r>
-            <a:endParaRPr lang="en-US" altLang="ko-KR" dirty="0"/>
+            <a:endParaRPr lang="en-US" altLang="ko-KR" b="1" dirty="0"/>
           </a:p>
           <a:p>
             <a:pPr marL="0" indent="0">
               <a:buNone/>
             </a:pPr>
             <a:r>
-              <a:rPr lang="en-US" altLang="ko-KR" dirty="0"/>
+              <a:rPr lang="en-US" altLang="ko-KR" b="1" dirty="0"/>
               <a:t>├── </a:t>
             </a:r>
             <a:r>
-              <a:rPr lang="en-US" altLang="ko-KR" dirty="0" err="1"/>
+              <a:rPr lang="en-US" altLang="ko-KR" b="1" dirty="0" err="1"/>
               <a:t>node_modules</a:t>
             </a:r>
-            <a:endParaRPr lang="en-US" altLang="ko-KR" dirty="0"/>
+            <a:endParaRPr lang="en-US" altLang="ko-KR" b="1" dirty="0"/>
           </a:p>
           <a:p>
             <a:pPr marL="0" indent="0">
               <a:buNone/>
             </a:pPr>
             <a:r>
-              <a:rPr lang="en-US" altLang="ko-KR" dirty="0"/>
+              <a:rPr lang="en-US" altLang="ko-KR" b="1" dirty="0"/>
               <a:t>├── package-</a:t>
             </a:r>
             <a:r>
-              <a:rPr lang="en-US" altLang="ko-KR" dirty="0" err="1"/>
+              <a:rPr lang="en-US" altLang="ko-KR" b="1" dirty="0" err="1"/>
               <a:t>lock.json</a:t>
             </a:r>
-            <a:endParaRPr lang="en-US" altLang="ko-KR" dirty="0"/>
+            <a:endParaRPr lang="en-US" altLang="ko-KR" b="1" dirty="0"/>
           </a:p>
           <a:p>
             <a:pPr marL="0" indent="0">
               <a:buNone/>
             </a:pPr>
             <a:r>
-              <a:rPr lang="en-US" altLang="ko-KR" dirty="0"/>
+              <a:rPr lang="en-US" altLang="ko-KR" b="1" dirty="0"/>
               <a:t>├── </a:t>
             </a:r>
             <a:r>
-              <a:rPr lang="en-US" altLang="ko-KR" dirty="0" err="1"/>
+              <a:rPr lang="en-US" altLang="ko-KR" b="1" dirty="0" err="1"/>
               <a:t>package.json</a:t>
             </a:r>
-            <a:endParaRPr lang="en-US" altLang="ko-KR" dirty="0"/>
+            <a:endParaRPr lang="en-US" altLang="ko-KR" b="1" dirty="0"/>
           </a:p>
           <a:p>
             <a:pPr marL="0" indent="0">
               <a:buNone/>
             </a:pPr>
             <a:r>
-              <a:rPr lang="en-US" altLang="ko-KR" dirty="0"/>
+              <a:rPr lang="en-US" altLang="ko-KR" b="1" dirty="0"/>
               <a:t>├── </a:t>
             </a:r>
             <a:r>
-              <a:rPr lang="en-US" altLang="ko-KR" dirty="0" err="1"/>
+              <a:rPr lang="en-US" altLang="ko-KR" b="1" dirty="0" err="1"/>
               <a:t>src</a:t>
             </a:r>
-            <a:endParaRPr lang="en-US" altLang="ko-KR" dirty="0"/>
+            <a:endParaRPr lang="en-US" altLang="ko-KR" b="1" dirty="0"/>
           </a:p>
           <a:p>
             <a:pPr marL="0" indent="0">
               <a:buNone/>
             </a:pPr>
             <a:r>
-              <a:rPr lang="en-US" altLang="ko-KR" dirty="0"/>
+              <a:rPr lang="en-US" altLang="ko-KR" b="1" dirty="0"/>
               <a:t>│   ├── </a:t>
             </a:r>
             <a:r>
-              <a:rPr lang="en-US" altLang="ko-KR" dirty="0" err="1"/>
+              <a:rPr lang="en-US" altLang="ko-KR" b="1" dirty="0" err="1"/>
               <a:t>app.controller.spec.ts</a:t>
             </a:r>
-            <a:endParaRPr lang="en-US" altLang="ko-KR" dirty="0"/>
+            <a:endParaRPr lang="en-US" altLang="ko-KR" b="1" dirty="0"/>
           </a:p>
           <a:p>
             <a:pPr marL="0" indent="0">
               <a:buNone/>
             </a:pPr>
             <a:r>
-              <a:rPr lang="en-US" altLang="ko-KR" dirty="0"/>
+              <a:rPr lang="en-US" altLang="ko-KR" b="1" dirty="0"/>
               <a:t>│   ├── </a:t>
             </a:r>
             <a:r>
-              <a:rPr lang="en-US" altLang="ko-KR" dirty="0" err="1"/>
+              <a:rPr lang="en-US" altLang="ko-KR" b="1" dirty="0" err="1"/>
               <a:t>app.controller.ts</a:t>
             </a:r>
-            <a:endParaRPr lang="en-US" altLang="ko-KR" dirty="0"/>
+            <a:endParaRPr lang="en-US" altLang="ko-KR" b="1" dirty="0"/>
           </a:p>
           <a:p>
             <a:pPr marL="0" indent="0">
               <a:buNone/>
             </a:pPr>
             <a:r>
-              <a:rPr lang="en-US" altLang="ko-KR" dirty="0"/>
+              <a:rPr lang="en-US" altLang="ko-KR" b="1" dirty="0"/>
               <a:t>│   ├── </a:t>
             </a:r>
             <a:r>
-              <a:rPr lang="en-US" altLang="ko-KR" dirty="0" err="1"/>
+              <a:rPr lang="en-US" altLang="ko-KR" b="1" dirty="0" err="1"/>
               <a:t>app.module.ts</a:t>
             </a:r>
-            <a:endParaRPr lang="en-US" altLang="ko-KR" dirty="0"/>
+            <a:endParaRPr lang="en-US" altLang="ko-KR" b="1" dirty="0"/>
           </a:p>
           <a:p>
             <a:pPr marL="0" indent="0">
               <a:buNone/>
             </a:pPr>
             <a:r>
-              <a:rPr lang="en-US" altLang="ko-KR" dirty="0"/>
+              <a:rPr lang="en-US" altLang="ko-KR" b="1" dirty="0"/>
               <a:t>│   ├── </a:t>
             </a:r>
             <a:r>
-              <a:rPr lang="en-US" altLang="ko-KR" dirty="0" err="1"/>
+              <a:rPr lang="en-US" altLang="ko-KR" b="1" dirty="0" err="1"/>
               <a:t>app.service.ts</a:t>
             </a:r>
-            <a:endParaRPr lang="en-US" altLang="ko-KR" dirty="0"/>
+            <a:endParaRPr lang="en-US" altLang="ko-KR" b="1" dirty="0"/>
           </a:p>
           <a:p>
             <a:pPr marL="0" indent="0">
               <a:buNone/>
             </a:pPr>
             <a:r>
-              <a:rPr lang="en-US" altLang="ko-KR" dirty="0"/>
+              <a:rPr lang="en-US" altLang="ko-KR" b="1" dirty="0"/>
               <a:t>│   └── </a:t>
             </a:r>
             <a:r>
-              <a:rPr lang="en-US" altLang="ko-KR" dirty="0" err="1"/>
+              <a:rPr lang="en-US" altLang="ko-KR" b="1" dirty="0" err="1"/>
               <a:t>main.ts</a:t>
             </a:r>
-            <a:endParaRPr lang="en-US" altLang="ko-KR" dirty="0"/>
+            <a:endParaRPr lang="en-US" altLang="ko-KR" b="1" dirty="0"/>
           </a:p>
           <a:p>
             <a:pPr marL="0" indent="0">
               <a:buNone/>
             </a:pPr>
             <a:r>
-              <a:rPr lang="en-US" altLang="ko-KR" dirty="0"/>
+              <a:rPr lang="en-US" altLang="ko-KR" b="1" dirty="0"/>
               <a:t>├── test</a:t>
             </a:r>
           </a:p>
@@ -4017,7 +4016,7 @@
               <a:buNone/>
             </a:pPr>
             <a:r>
-              <a:rPr lang="en-US" altLang="ko-KR" dirty="0"/>
+              <a:rPr lang="en-US" altLang="ko-KR" b="1" dirty="0"/>
               <a:t>│   ├── app.e2e-spec.ts</a:t>
             </a:r>
           </a:p>
@@ -4026,7 +4025,7 @@
               <a:buNone/>
             </a:pPr>
             <a:r>
-              <a:rPr lang="en-US" altLang="ko-KR" dirty="0"/>
+              <a:rPr lang="en-US" altLang="ko-KR" b="1" dirty="0"/>
               <a:t>│   └── jest-e2e.json</a:t>
             </a:r>
           </a:p>
@@ -4035,28 +4034,28 @@
               <a:buNone/>
             </a:pPr>
             <a:r>
-              <a:rPr lang="en-US" altLang="ko-KR" dirty="0"/>
+              <a:rPr lang="en-US" altLang="ko-KR" b="1" dirty="0"/>
               <a:t>├── </a:t>
             </a:r>
             <a:r>
-              <a:rPr lang="en-US" altLang="ko-KR" dirty="0" err="1"/>
+              <a:rPr lang="en-US" altLang="ko-KR" b="1" dirty="0" err="1"/>
               <a:t>tsconfig.build.json</a:t>
             </a:r>
-            <a:endParaRPr lang="en-US" altLang="ko-KR" dirty="0"/>
+            <a:endParaRPr lang="en-US" altLang="ko-KR" b="1" dirty="0"/>
           </a:p>
           <a:p>
             <a:pPr marL="0" indent="0">
               <a:buNone/>
             </a:pPr>
             <a:r>
-              <a:rPr lang="en-US" altLang="ko-KR" dirty="0"/>
+              <a:rPr lang="en-US" altLang="ko-KR" b="1" dirty="0"/>
               <a:t>└── </a:t>
             </a:r>
             <a:r>
-              <a:rPr lang="en-US" altLang="ko-KR" dirty="0" err="1"/>
+              <a:rPr lang="en-US" altLang="ko-KR" b="1" dirty="0" err="1"/>
               <a:t>tsconfig.json</a:t>
             </a:r>
-            <a:endParaRPr lang="en-US" altLang="ko-KR" dirty="0"/>
+            <a:endParaRPr lang="en-US" altLang="ko-KR" b="1" dirty="0"/>
           </a:p>
         </p:txBody>
       </p:sp>
